--- a/atelier/atelier-s07-listing-highlight.pptx
+++ b/atelier/atelier-s07-listing-highlight.pptx
@@ -3140,7 +3140,7 @@
         </p:nvSpPr>
         <p:spPr>
           <a:xfrm>
-            <a:off x="762000" y="12727186"/>
+            <a:off x="762000" y="12875865"/>
             <a:ext cx="8763000" cy="9525"/>
           </a:xfrm>
           <a:prstGeom prst="rect">
@@ -3184,7 +3184,7 @@
         </p:nvSpPr>
         <p:spPr>
           <a:xfrm>
-            <a:off x="762000" y="13271897"/>
+            <a:off x="762000" y="13855005"/>
             <a:ext cx="8763000" cy="9525"/>
           </a:xfrm>
           <a:prstGeom prst="rect">
@@ -3228,7 +3228,7 @@
         </p:nvSpPr>
         <p:spPr>
           <a:xfrm>
-            <a:off x="762000" y="13816608"/>
+            <a:off x="762000" y="14834146"/>
             <a:ext cx="8763000" cy="9525"/>
           </a:xfrm>
           <a:prstGeom prst="rect">
@@ -3272,14 +3272,14 @@
         </p:nvSpPr>
         <p:spPr>
           <a:xfrm>
-            <a:off x="762000" y="15735300"/>
+            <a:off x="762000" y="15782925"/>
             <a:ext cx="8763000" cy="9525"/>
           </a:xfrm>
           <a:prstGeom prst="rect">
             <a:avLst/>
           </a:prstGeom>
           <a:solidFill>
-            <a:srgbClr val="524F4B"/>
+            <a:srgbClr val="595552"/>
           </a:solidFill>
           <a:ln>
             <a:noFill/>
@@ -3316,14 +3316,14 @@
         </p:nvSpPr>
         <p:spPr>
           <a:xfrm>
-            <a:off x="762000" y="16373475"/>
+            <a:off x="762000" y="16659225"/>
             <a:ext cx="8763000" cy="9525"/>
           </a:xfrm>
           <a:prstGeom prst="rect">
             <a:avLst/>
           </a:prstGeom>
           <a:solidFill>
-            <a:srgbClr val="524F4B"/>
+            <a:srgbClr val="595552"/>
           </a:solidFill>
           <a:ln>
             <a:noFill/>
@@ -3360,14 +3360,14 @@
         </p:nvSpPr>
         <p:spPr>
           <a:xfrm>
-            <a:off x="762000" y="15735300"/>
-            <a:ext cx="9525" cy="647700"/>
+            <a:off x="762000" y="15782925"/>
+            <a:ext cx="9525" cy="885825"/>
           </a:xfrm>
           <a:prstGeom prst="rect">
             <a:avLst/>
           </a:prstGeom>
           <a:solidFill>
-            <a:srgbClr val="524F4B"/>
+            <a:srgbClr val="595552"/>
           </a:solidFill>
           <a:ln>
             <a:noFill/>
@@ -3404,14 +3404,14 @@
         </p:nvSpPr>
         <p:spPr>
           <a:xfrm>
-            <a:off x="9515475" y="15735300"/>
-            <a:ext cx="9525" cy="647700"/>
+            <a:off x="9515475" y="15782925"/>
+            <a:ext cx="9525" cy="885825"/>
           </a:xfrm>
           <a:prstGeom prst="rect">
             <a:avLst/>
           </a:prstGeom>
           <a:solidFill>
-            <a:srgbClr val="524F4B"/>
+            <a:srgbClr val="595552"/>
           </a:solidFill>
           <a:ln>
             <a:noFill/>
@@ -3448,8 +3448,8 @@
         </p:nvSpPr>
         <p:spPr>
           <a:xfrm>
-            <a:off x="1024416" y="16012004"/>
-            <a:ext cx="94293" cy="94292"/>
+            <a:off x="1077621" y="16165220"/>
+            <a:ext cx="121233" cy="121234"/>
           </a:xfrm>
           <a:prstGeom prst="rect">
             <a:avLst/>
@@ -3492,8 +3492,8 @@
         </p:nvSpPr>
         <p:spPr>
           <a:xfrm>
-            <a:off x="762000" y="12344400"/>
-            <a:ext cx="716280" cy="230386"/>
+            <a:off x="762000" y="12192000"/>
+            <a:ext cx="960120" cy="398115"/>
           </a:xfrm>
           <a:prstGeom prst="rect">
             <a:avLst/>
@@ -3510,7 +3510,7 @@
               </a:lnSpc>
             </a:pPr>
             <a:r>
-              <a:rPr sz="1650" i="1" b="0">
+              <a:rPr sz="2850" i="1" b="0">
                 <a:solidFill>
                   <a:srgbClr val="BC5B36"/>
                 </a:solidFill>
@@ -3531,8 +3531,8 @@
         </p:nvSpPr>
         <p:spPr>
           <a:xfrm>
-            <a:off x="1143000" y="12344400"/>
-            <a:ext cx="5198745" cy="200025"/>
+            <a:off x="1295400" y="12192000"/>
+            <a:ext cx="8410575" cy="323850"/>
           </a:xfrm>
           <a:prstGeom prst="rect">
             <a:avLst/>
@@ -3545,7 +3545,7 @@
           <a:p>
             <a:pPr algn="l"/>
             <a:r>
-              <a:rPr sz="1350" i="0" b="0">
+              <a:rPr sz="2250" i="0" b="0">
                 <a:solidFill>
                   <a:srgbClr val="FAF6F0"/>
                 </a:solidFill>
@@ -3566,8 +3566,8 @@
         </p:nvSpPr>
         <p:spPr>
           <a:xfrm>
-            <a:off x="762000" y="12889111"/>
-            <a:ext cx="716280" cy="230386"/>
+            <a:off x="762000" y="13171140"/>
+            <a:ext cx="960120" cy="398115"/>
           </a:xfrm>
           <a:prstGeom prst="rect">
             <a:avLst/>
@@ -3584,7 +3584,7 @@
               </a:lnSpc>
             </a:pPr>
             <a:r>
-              <a:rPr sz="1650" i="1" b="0">
+              <a:rPr sz="2850" i="1" b="0">
                 <a:solidFill>
                   <a:srgbClr val="BC5B36"/>
                 </a:solidFill>
@@ -3605,8 +3605,8 @@
         </p:nvSpPr>
         <p:spPr>
           <a:xfrm>
-            <a:off x="1143000" y="12889111"/>
-            <a:ext cx="4863703" cy="200025"/>
+            <a:off x="1295400" y="13171140"/>
+            <a:ext cx="7852172" cy="323850"/>
           </a:xfrm>
           <a:prstGeom prst="rect">
             <a:avLst/>
@@ -3619,7 +3619,7 @@
           <a:p>
             <a:pPr algn="l"/>
             <a:r>
-              <a:rPr sz="1350" i="0" b="0">
+              <a:rPr sz="2250" i="0" b="0">
                 <a:solidFill>
                   <a:srgbClr val="FAF6F0"/>
                 </a:solidFill>
@@ -3640,8 +3640,8 @@
         </p:nvSpPr>
         <p:spPr>
           <a:xfrm>
-            <a:off x="762000" y="13433822"/>
-            <a:ext cx="716280" cy="230386"/>
+            <a:off x="762000" y="14150280"/>
+            <a:ext cx="960120" cy="398115"/>
           </a:xfrm>
           <a:prstGeom prst="rect">
             <a:avLst/>
@@ -3658,7 +3658,7 @@
               </a:lnSpc>
             </a:pPr>
             <a:r>
-              <a:rPr sz="1650" i="1" b="0">
+              <a:rPr sz="2850" i="1" b="0">
                 <a:solidFill>
                   <a:srgbClr val="BC5B36"/>
                 </a:solidFill>
@@ -3679,8 +3679,8 @@
         </p:nvSpPr>
         <p:spPr>
           <a:xfrm>
-            <a:off x="1143000" y="13433822"/>
-            <a:ext cx="5504974" cy="200025"/>
+            <a:off x="1295400" y="14150280"/>
+            <a:ext cx="8921115" cy="323850"/>
           </a:xfrm>
           <a:prstGeom prst="rect">
             <a:avLst/>
@@ -3693,7 +3693,7 @@
           <a:p>
             <a:pPr algn="l"/>
             <a:r>
-              <a:rPr sz="1350" i="0" b="0">
+              <a:rPr sz="2250" i="0" b="0">
                 <a:solidFill>
                   <a:srgbClr val="FAF6F0"/>
                 </a:solidFill>
@@ -3714,8 +3714,8 @@
         </p:nvSpPr>
         <p:spPr>
           <a:xfrm>
-            <a:off x="1238250" y="15978188"/>
-            <a:ext cx="2742486" cy="161925"/>
+            <a:off x="1333500" y="16097250"/>
+            <a:ext cx="3903821" cy="257175"/>
           </a:xfrm>
           <a:prstGeom prst="rect">
             <a:avLst/>
@@ -3728,7 +3728,7 @@
           <a:p>
             <a:pPr algn="l"/>
             <a:r>
-              <a:rPr sz="1125" i="0" b="1" spc="135">
+              <a:rPr sz="1725" i="0" b="1" spc="172">
                 <a:solidFill>
                   <a:srgbClr val="FAF6F0"/>
                 </a:solidFill>
@@ -3749,8 +3749,8 @@
         </p:nvSpPr>
         <p:spPr>
           <a:xfrm>
-            <a:off x="9105900" y="15954375"/>
-            <a:ext cx="609600" cy="209550"/>
+            <a:off x="8982075" y="16078200"/>
+            <a:ext cx="716280" cy="295275"/>
           </a:xfrm>
           <a:prstGeom prst="rect">
             <a:avLst/>
@@ -3763,7 +3763,7 @@
           <a:p>
             <a:pPr algn="l"/>
             <a:r>
-              <a:rPr sz="1350" i="0" b="0">
+              <a:rPr sz="1950" i="0" b="0">
                 <a:solidFill>
                   <a:srgbClr val="BC5B36"/>
                 </a:solidFill>
@@ -3784,8 +3784,8 @@
         </p:nvSpPr>
         <p:spPr>
           <a:xfrm>
-            <a:off x="2801585" y="17297400"/>
-            <a:ext cx="4683681" cy="123825"/>
+            <a:off x="1823799" y="17192625"/>
+            <a:ext cx="6639401" cy="180975"/>
           </a:xfrm>
           <a:prstGeom prst="rect">
             <a:avLst/>
@@ -3798,9 +3798,9 @@
           <a:p>
             <a:pPr algn="ctr"/>
             <a:r>
-              <a:rPr sz="825" i="0" b="0" spc="165">
+              <a:rPr sz="1200" i="0" b="0" spc="240">
                 <a:solidFill>
-                  <a:srgbClr val="B7B3AE"/>
+                  <a:srgbClr val="BBB8B2"/>
                 </a:solidFill>
                 <a:latin typeface="Space Mono"/>
                 <a:ea typeface="Space Mono"/>
@@ -3828,7 +3828,7 @@
         <p:spPr>
           <a:xfrm>
             <a:off x="0" y="0"/>
-            <a:ext cx="10287000" cy="11525250"/>
+            <a:ext cx="10287000" cy="11239500"/>
           </a:xfrm>
           <a:prstGeom prst="rect">
             <a:avLst/>

--- a/atelier/atelier-s07-listing-highlight.pptx
+++ b/atelier/atelier-s07-listing-highlight.pptx
@@ -3140,7 +3140,7 @@
         </p:nvSpPr>
         <p:spPr>
           <a:xfrm>
-            <a:off x="762000" y="12875865"/>
+            <a:off x="762000" y="12896850"/>
             <a:ext cx="8763000" cy="9525"/>
           </a:xfrm>
           <a:prstGeom prst="rect">
@@ -3184,7 +3184,7 @@
         </p:nvSpPr>
         <p:spPr>
           <a:xfrm>
-            <a:off x="762000" y="13855005"/>
+            <a:off x="762000" y="13896975"/>
             <a:ext cx="8763000" cy="9525"/>
           </a:xfrm>
           <a:prstGeom prst="rect">
@@ -3228,7 +3228,7 @@
         </p:nvSpPr>
         <p:spPr>
           <a:xfrm>
-            <a:off x="762000" y="14834146"/>
+            <a:off x="762000" y="14897100"/>
             <a:ext cx="8763000" cy="9525"/>
           </a:xfrm>
           <a:prstGeom prst="rect">
@@ -3493,7 +3493,7 @@
         <p:spPr>
           <a:xfrm>
             <a:off x="762000" y="12192000"/>
-            <a:ext cx="960120" cy="398115"/>
+            <a:ext cx="990600" cy="419100"/>
           </a:xfrm>
           <a:prstGeom prst="rect">
             <a:avLst/>
@@ -3510,7 +3510,7 @@
               </a:lnSpc>
             </a:pPr>
             <a:r>
-              <a:rPr sz="2850" i="1" b="0">
+              <a:rPr sz="3000" i="1" b="0">
                 <a:solidFill>
                   <a:srgbClr val="BC5B36"/>
                 </a:solidFill>
@@ -3531,8 +3531,8 @@
         </p:nvSpPr>
         <p:spPr>
           <a:xfrm>
-            <a:off x="1295400" y="12192000"/>
-            <a:ext cx="8410575" cy="323850"/>
+            <a:off x="1314450" y="12192000"/>
+            <a:ext cx="9748599" cy="381000"/>
           </a:xfrm>
           <a:prstGeom prst="rect">
             <a:avLst/>
@@ -3545,7 +3545,7 @@
           <a:p>
             <a:pPr algn="l"/>
             <a:r>
-              <a:rPr sz="2250" i="0" b="0">
+              <a:rPr sz="2625" i="0" b="0">
                 <a:solidFill>
                   <a:srgbClr val="FAF6F0"/>
                 </a:solidFill>
@@ -3566,8 +3566,8 @@
         </p:nvSpPr>
         <p:spPr>
           <a:xfrm>
-            <a:off x="762000" y="13171140"/>
-            <a:ext cx="960120" cy="398115"/>
+            <a:off x="762000" y="13192125"/>
+            <a:ext cx="990600" cy="419100"/>
           </a:xfrm>
           <a:prstGeom prst="rect">
             <a:avLst/>
@@ -3584,7 +3584,7 @@
               </a:lnSpc>
             </a:pPr>
             <a:r>
-              <a:rPr sz="2850" i="1" b="0">
+              <a:rPr sz="3000" i="1" b="0">
                 <a:solidFill>
                   <a:srgbClr val="BC5B36"/>
                 </a:solidFill>
@@ -3605,8 +3605,8 @@
         </p:nvSpPr>
         <p:spPr>
           <a:xfrm>
-            <a:off x="1295400" y="13171140"/>
-            <a:ext cx="7852172" cy="323850"/>
+            <a:off x="1314450" y="13192125"/>
+            <a:ext cx="9097328" cy="381000"/>
           </a:xfrm>
           <a:prstGeom prst="rect">
             <a:avLst/>
@@ -3619,7 +3619,7 @@
           <a:p>
             <a:pPr algn="l"/>
             <a:r>
-              <a:rPr sz="2250" i="0" b="0">
+              <a:rPr sz="2625" i="0" b="0">
                 <a:solidFill>
                   <a:srgbClr val="FAF6F0"/>
                 </a:solidFill>
@@ -3640,8 +3640,8 @@
         </p:nvSpPr>
         <p:spPr>
           <a:xfrm>
-            <a:off x="762000" y="14150280"/>
-            <a:ext cx="960120" cy="398115"/>
+            <a:off x="762000" y="14192250"/>
+            <a:ext cx="990600" cy="419100"/>
           </a:xfrm>
           <a:prstGeom prst="rect">
             <a:avLst/>
@@ -3658,7 +3658,7 @@
               </a:lnSpc>
             </a:pPr>
             <a:r>
-              <a:rPr sz="2850" i="1" b="0">
+              <a:rPr sz="3000" i="1" b="0">
                 <a:solidFill>
                   <a:srgbClr val="BC5B36"/>
                 </a:solidFill>
@@ -3679,8 +3679,8 @@
         </p:nvSpPr>
         <p:spPr>
           <a:xfrm>
-            <a:off x="1295400" y="14150280"/>
-            <a:ext cx="8921115" cy="323850"/>
+            <a:off x="1314450" y="14192250"/>
+            <a:ext cx="10344388" cy="381000"/>
           </a:xfrm>
           <a:prstGeom prst="rect">
             <a:avLst/>
@@ -3693,7 +3693,7 @@
           <a:p>
             <a:pPr algn="l"/>
             <a:r>
-              <a:rPr sz="2250" i="0" b="0">
+              <a:rPr sz="2625" i="0" b="0">
                 <a:solidFill>
                   <a:srgbClr val="FAF6F0"/>
                 </a:solidFill>
@@ -3714,8 +3714,8 @@
         </p:nvSpPr>
         <p:spPr>
           <a:xfrm>
-            <a:off x="1333500" y="16097250"/>
-            <a:ext cx="3903821" cy="257175"/>
+            <a:off x="1333500" y="16078200"/>
+            <a:ext cx="4401264" cy="295275"/>
           </a:xfrm>
           <a:prstGeom prst="rect">
             <a:avLst/>
@@ -3728,7 +3728,7 @@
           <a:p>
             <a:pPr algn="l"/>
             <a:r>
-              <a:rPr sz="1725" i="0" b="1" spc="172">
+              <a:rPr sz="2025" i="0" b="1" spc="162">
                 <a:solidFill>
                   <a:srgbClr val="FAF6F0"/>
                 </a:solidFill>
@@ -3784,8 +3784,8 @@
         </p:nvSpPr>
         <p:spPr>
           <a:xfrm>
-            <a:off x="1823799" y="17192625"/>
-            <a:ext cx="6639401" cy="180975"/>
+            <a:off x="1329690" y="17164050"/>
+            <a:ext cx="7627620" cy="209550"/>
           </a:xfrm>
           <a:prstGeom prst="rect">
             <a:avLst/>
@@ -3798,7 +3798,7 @@
           <a:p>
             <a:pPr algn="ctr"/>
             <a:r>
-              <a:rPr sz="1200" i="0" b="0" spc="240">
+              <a:rPr sz="1425" i="0" b="0" spc="256">
                 <a:solidFill>
                   <a:srgbClr val="BBB8B2"/>
                 </a:solidFill>
